--- a/atelier/atelier-f12-coming-soon.pptx
+++ b/atelier/atelier-f12-coming-soon.pptx
@@ -3360,7 +3360,7 @@
         </p:nvSpPr>
         <p:spPr>
           <a:xfrm>
-            <a:off x="666750" y="8210550"/>
+            <a:off x="666750" y="8265468"/>
             <a:ext cx="8953500" cy="9525"/>
           </a:xfrm>
           <a:prstGeom prst="rect">
@@ -3640,7 +3640,7 @@
         </p:nvSpPr>
         <p:spPr>
           <a:xfrm>
-            <a:off x="666750" y="3486299"/>
+            <a:off x="666750" y="3509070"/>
             <a:ext cx="14706600" cy="133350"/>
           </a:xfrm>
           <a:prstGeom prst="rect">
@@ -3675,7 +3675,7 @@
         </p:nvSpPr>
         <p:spPr>
           <a:xfrm>
-            <a:off x="666750" y="3695849"/>
+            <a:off x="666750" y="3718620"/>
             <a:ext cx="10961846" cy="1276350"/>
           </a:xfrm>
           <a:prstGeom prst="rect">
@@ -3714,7 +3714,7 @@
         </p:nvSpPr>
         <p:spPr>
           <a:xfrm>
-            <a:off x="666750" y="4775895"/>
+            <a:off x="666750" y="4770090"/>
             <a:ext cx="5561171" cy="1266825"/>
           </a:xfrm>
           <a:prstGeom prst="rect">
@@ -3728,7 +3728,7 @@
           <a:p>
             <a:pPr algn="l">
               <a:lnSpc>
-                <a:spcPct val="96000"/>
+                <a:spcPct val="92000"/>
               </a:lnSpc>
             </a:pPr>
             <a:r>
@@ -3753,7 +3753,7 @@
         </p:nvSpPr>
         <p:spPr>
           <a:xfrm>
-            <a:off x="666750" y="5844480"/>
+            <a:off x="666750" y="5821561"/>
             <a:ext cx="13569315" cy="1276350"/>
           </a:xfrm>
           <a:prstGeom prst="rect">
@@ -3792,7 +3792,7 @@
         </p:nvSpPr>
         <p:spPr>
           <a:xfrm>
-            <a:off x="666750" y="8429625"/>
+            <a:off x="666750" y="8484543"/>
             <a:ext cx="5156121" cy="104775"/>
           </a:xfrm>
           <a:prstGeom prst="rect">
@@ -3827,8 +3827,8 @@
         </p:nvSpPr>
         <p:spPr>
           <a:xfrm>
-            <a:off x="666750" y="8610600"/>
-            <a:ext cx="5156121" cy="247650"/>
+            <a:off x="666750" y="8665518"/>
+            <a:ext cx="5156121" cy="192732"/>
           </a:xfrm>
           <a:prstGeom prst="rect">
             <a:avLst/>
@@ -3839,7 +3839,11 @@
           <a:bodyPr wrap="none" anchor="t" lIns="0" rIns="0" tIns="0" bIns="0"/>
           <a:lstStyle/>
           <a:p>
-            <a:pPr algn="l"/>
+            <a:pPr algn="l">
+              <a:lnSpc>
+                <a:spcPct val="92000"/>
+              </a:lnSpc>
+            </a:pPr>
             <a:r>
               <a:rPr sz="1650" i="1" b="0">
                 <a:solidFill>
@@ -3862,7 +3866,7 @@
         </p:nvSpPr>
         <p:spPr>
           <a:xfrm>
-            <a:off x="3651200" y="8429625"/>
+            <a:off x="3651200" y="8484543"/>
             <a:ext cx="5156359" cy="104775"/>
           </a:xfrm>
           <a:prstGeom prst="rect">
@@ -3897,8 +3901,8 @@
         </p:nvSpPr>
         <p:spPr>
           <a:xfrm>
-            <a:off x="3651200" y="8610600"/>
-            <a:ext cx="5156359" cy="247650"/>
+            <a:off x="3651200" y="8665518"/>
+            <a:ext cx="5156359" cy="192732"/>
           </a:xfrm>
           <a:prstGeom prst="rect">
             <a:avLst/>
@@ -3909,7 +3913,11 @@
           <a:bodyPr wrap="none" anchor="t" lIns="0" rIns="0" tIns="0" bIns="0"/>
           <a:lstStyle/>
           <a:p>
-            <a:pPr algn="l"/>
+            <a:pPr algn="l">
+              <a:lnSpc>
+                <a:spcPct val="92000"/>
+              </a:lnSpc>
+            </a:pPr>
             <a:r>
               <a:rPr sz="1650" i="1" b="0">
                 <a:solidFill>
@@ -3932,7 +3940,7 @@
         </p:nvSpPr>
         <p:spPr>
           <a:xfrm>
-            <a:off x="6635800" y="8429625"/>
+            <a:off x="6635800" y="8484543"/>
             <a:ext cx="5156121" cy="104775"/>
           </a:xfrm>
           <a:prstGeom prst="rect">
@@ -3967,8 +3975,8 @@
         </p:nvSpPr>
         <p:spPr>
           <a:xfrm>
-            <a:off x="6635800" y="8610600"/>
-            <a:ext cx="5156121" cy="247650"/>
+            <a:off x="6635800" y="8665518"/>
+            <a:ext cx="5156121" cy="192732"/>
           </a:xfrm>
           <a:prstGeom prst="rect">
             <a:avLst/>
@@ -3979,7 +3987,11 @@
           <a:bodyPr wrap="none" anchor="t" lIns="0" rIns="0" tIns="0" bIns="0"/>
           <a:lstStyle/>
           <a:p>
-            <a:pPr algn="l"/>
+            <a:pPr algn="l">
+              <a:lnSpc>
+                <a:spcPct val="92000"/>
+              </a:lnSpc>
+            </a:pPr>
             <a:r>
               <a:rPr sz="1650" i="1" b="0">
                 <a:solidFill>
